--- a/frontend/public/PPT_template/SYMBIOT_2026_VLSI_PPT.pptx
+++ b/frontend/public/PPT_template/SYMBIOT_2026_VLSI_PPT.pptx
@@ -161,6 +161,89 @@
 </p:presentation>
 </file>
 
+<file path=ppt/revisionInfo.xml><?xml version="1.0" encoding="utf-8"?>
+<p1510:revInfo xmlns:a="http://schemas.openxmlformats.org/drawingml/2006/main" xmlns:r="http://schemas.openxmlformats.org/officeDocument/2006/relationships" xmlns:p1510="http://schemas.microsoft.com/office/powerpoint/2015/10/main">
+  <p1510:revLst>
+    <p1510:client id="{CF196B7F-C8E8-44AD-AE72-A09B37083469}" v="2" dt="2026-04-01T15:56:29.444"/>
+  </p1510:revLst>
+</p1510:revInfo>
+</file>
+
+<file path=ppt/changesInfos/changesInfo1.xml><?xml version="1.0" encoding="utf-8"?>
+<pc:chgInfo xmlns:a="http://schemas.openxmlformats.org/drawingml/2006/main" xmlns:r="http://schemas.openxmlformats.org/officeDocument/2006/relationships" xmlns:ac="http://schemas.microsoft.com/office/drawing/2013/main/command" xmlns:pc="http://schemas.microsoft.com/office/powerpoint/2013/main/command">
+  <pc:docChgLst>
+    <pc:chgData name="CHETHAN V" userId="07f6fd76e3ffbd60" providerId="LiveId" clId="{7932CFC4-E4E1-4916-A2E0-F5379477C3D7}"/>
+    <pc:docChg chg="undo custSel addSld delSld modSld">
+      <pc:chgData name="CHETHAN V" userId="07f6fd76e3ffbd60" providerId="LiveId" clId="{7932CFC4-E4E1-4916-A2E0-F5379477C3D7}" dt="2026-04-01T15:57:02.546" v="229" actId="20577"/>
+      <pc:docMkLst>
+        <pc:docMk/>
+      </pc:docMkLst>
+      <pc:sldChg chg="modSp mod">
+        <pc:chgData name="CHETHAN V" userId="07f6fd76e3ffbd60" providerId="LiveId" clId="{7932CFC4-E4E1-4916-A2E0-F5379477C3D7}" dt="2026-04-01T15:43:09.935" v="104" actId="20577"/>
+        <pc:sldMkLst>
+          <pc:docMk/>
+          <pc:sldMk cId="486523185" sldId="258"/>
+        </pc:sldMkLst>
+        <pc:spChg chg="mod">
+          <ac:chgData name="CHETHAN V" userId="07f6fd76e3ffbd60" providerId="LiveId" clId="{7932CFC4-E4E1-4916-A2E0-F5379477C3D7}" dt="2026-04-01T15:43:09.935" v="104" actId="20577"/>
+          <ac:spMkLst>
+            <pc:docMk/>
+            <pc:sldMk cId="486523185" sldId="258"/>
+            <ac:spMk id="2" creationId="{E10AAD9B-C9AF-B674-114E-2A084989EB51}"/>
+          </ac:spMkLst>
+        </pc:spChg>
+      </pc:sldChg>
+      <pc:sldChg chg="modSp mod">
+        <pc:chgData name="CHETHAN V" userId="07f6fd76e3ffbd60" providerId="LiveId" clId="{7932CFC4-E4E1-4916-A2E0-F5379477C3D7}" dt="2026-04-01T15:17:53.705" v="56" actId="20577"/>
+        <pc:sldMkLst>
+          <pc:docMk/>
+          <pc:sldMk cId="2362505721" sldId="259"/>
+        </pc:sldMkLst>
+        <pc:spChg chg="mod">
+          <ac:chgData name="CHETHAN V" userId="07f6fd76e3ffbd60" providerId="LiveId" clId="{7932CFC4-E4E1-4916-A2E0-F5379477C3D7}" dt="2026-04-01T15:17:53.705" v="56" actId="20577"/>
+          <ac:spMkLst>
+            <pc:docMk/>
+            <pc:sldMk cId="2362505721" sldId="259"/>
+            <ac:spMk id="2" creationId="{1384F52A-717C-0808-40B4-C0508BC1E7EB}"/>
+          </ac:spMkLst>
+        </pc:spChg>
+      </pc:sldChg>
+      <pc:sldChg chg="addSp modSp add del mod">
+        <pc:chgData name="CHETHAN V" userId="07f6fd76e3ffbd60" providerId="LiveId" clId="{7932CFC4-E4E1-4916-A2E0-F5379477C3D7}" dt="2026-04-01T15:57:02.546" v="229" actId="20577"/>
+        <pc:sldMkLst>
+          <pc:docMk/>
+          <pc:sldMk cId="1681552224" sldId="260"/>
+        </pc:sldMkLst>
+        <pc:spChg chg="add mod">
+          <ac:chgData name="CHETHAN V" userId="07f6fd76e3ffbd60" providerId="LiveId" clId="{7932CFC4-E4E1-4916-A2E0-F5379477C3D7}" dt="2026-04-01T15:54:42.028" v="159" actId="1076"/>
+          <ac:spMkLst>
+            <pc:docMk/>
+            <pc:sldMk cId="1681552224" sldId="260"/>
+            <ac:spMk id="2" creationId="{024732D7-B310-5D91-0DE1-A0ABB8367F00}"/>
+          </ac:spMkLst>
+        </pc:spChg>
+        <pc:spChg chg="mod">
+          <ac:chgData name="CHETHAN V" userId="07f6fd76e3ffbd60" providerId="LiveId" clId="{7932CFC4-E4E1-4916-A2E0-F5379477C3D7}" dt="2026-04-01T15:47:31.545" v="153" actId="20577"/>
+          <ac:spMkLst>
+            <pc:docMk/>
+            <pc:sldMk cId="1681552224" sldId="260"/>
+            <ac:spMk id="3" creationId="{E6AE6FCE-0C43-FA21-92D7-B499EEA834D2}"/>
+          </ac:spMkLst>
+        </pc:spChg>
+        <pc:spChg chg="add mod">
+          <ac:chgData name="CHETHAN V" userId="07f6fd76e3ffbd60" providerId="LiveId" clId="{7932CFC4-E4E1-4916-A2E0-F5379477C3D7}" dt="2026-04-01T15:57:02.546" v="229" actId="20577"/>
+          <ac:spMkLst>
+            <pc:docMk/>
+            <pc:sldMk cId="1681552224" sldId="260"/>
+            <ac:spMk id="4" creationId="{35622807-D63C-B90E-5683-4F6E9FF49F8E}"/>
+          </ac:spMkLst>
+        </pc:spChg>
+      </pc:sldChg>
+    </pc:docChg>
+  </pc:docChgLst>
+</pc:chgInfo>
+</file>
+
 <file path=ppt/slideLayouts/slideLayout1.xml><?xml version="1.0" encoding="utf-8"?>
 <p:sldLayout xmlns:a="http://schemas.openxmlformats.org/drawingml/2006/main" xmlns:r="http://schemas.openxmlformats.org/officeDocument/2006/relationships" xmlns:p="http://schemas.openxmlformats.org/presentationml/2006/main" preserve="1" userDrawn="1">
   <p:cSld name="WATCH OUT">
@@ -2504,6 +2587,53 @@
       </p:sp>
       <p:sp>
         <p:nvSpPr>
+          <p:cNvPr id="13" name="TextBox 8">
+            <a:extLst>
+              <a:ext uri="{FF2B5EF4-FFF2-40B4-BE49-F238E27FC236}">
+                <a16:creationId xmlns:a16="http://schemas.microsoft.com/office/drawing/2014/main" id="{7D3C03E1-149B-AE18-4FF5-7AF4BAE71982}"/>
+              </a:ext>
+            </a:extLst>
+          </p:cNvPr>
+          <p:cNvSpPr txBox="1"/>
+          <p:nvPr userDrawn="1"/>
+        </p:nvSpPr>
+        <p:spPr>
+          <a:xfrm>
+            <a:off x="1299426" y="9715500"/>
+            <a:ext cx="4556760" cy="318135"/>
+          </a:xfrm>
+          <a:prstGeom prst="rect">
+            <a:avLst/>
+          </a:prstGeom>
+        </p:spPr>
+        <p:txBody>
+          <a:bodyPr lIns="0" tIns="0" rIns="0" bIns="0" rtlCol="0" anchor="t">
+            <a:spAutoFit/>
+          </a:bodyPr>
+          <a:lstStyle/>
+          <a:p>
+            <a:pPr algn="l">
+              <a:lnSpc>
+                <a:spcPts val="2520"/>
+              </a:lnSpc>
+            </a:pPr>
+            <a:r>
+              <a:rPr lang="en-US" sz="2000" b="1" spc="100">
+                <a:solidFill>
+                  <a:srgbClr val="F5F5DC"/>
+                </a:solidFill>
+                <a:latin typeface="Montserrat Classic Bold"/>
+                <a:ea typeface="Montserrat Classic Bold"/>
+                <a:cs typeface="Montserrat Classic Bold"/>
+                <a:sym typeface="Montserrat Classic Bold"/>
+              </a:rPr>
+              <a:t>TEAM NAME</a:t>
+            </a:r>
+          </a:p>
+        </p:txBody>
+      </p:sp>
+      <p:sp>
+        <p:nvSpPr>
           <p:cNvPr id="14" name="Freeform 9">
             <a:extLst>
               <a:ext uri="{FF2B5EF4-FFF2-40B4-BE49-F238E27FC236}">
@@ -3035,6 +3165,53 @@
       </p:sp>
       <p:sp>
         <p:nvSpPr>
+          <p:cNvPr id="14" name="TextBox 8">
+            <a:extLst>
+              <a:ext uri="{FF2B5EF4-FFF2-40B4-BE49-F238E27FC236}">
+                <a16:creationId xmlns:a16="http://schemas.microsoft.com/office/drawing/2014/main" id="{B03BA01C-8C05-0CE6-E485-9825051EE173}"/>
+              </a:ext>
+            </a:extLst>
+          </p:cNvPr>
+          <p:cNvSpPr txBox="1"/>
+          <p:nvPr userDrawn="1"/>
+        </p:nvSpPr>
+        <p:spPr>
+          <a:xfrm>
+            <a:off x="1299426" y="9715500"/>
+            <a:ext cx="4556760" cy="318135"/>
+          </a:xfrm>
+          <a:prstGeom prst="rect">
+            <a:avLst/>
+          </a:prstGeom>
+        </p:spPr>
+        <p:txBody>
+          <a:bodyPr lIns="0" tIns="0" rIns="0" bIns="0" rtlCol="0" anchor="t">
+            <a:spAutoFit/>
+          </a:bodyPr>
+          <a:lstStyle/>
+          <a:p>
+            <a:pPr algn="l">
+              <a:lnSpc>
+                <a:spcPts val="2520"/>
+              </a:lnSpc>
+            </a:pPr>
+            <a:r>
+              <a:rPr lang="en-US" sz="2000" b="1" spc="100">
+                <a:solidFill>
+                  <a:srgbClr val="F5F5DC"/>
+                </a:solidFill>
+                <a:latin typeface="Montserrat Classic Bold"/>
+                <a:ea typeface="Montserrat Classic Bold"/>
+                <a:cs typeface="Montserrat Classic Bold"/>
+                <a:sym typeface="Montserrat Classic Bold"/>
+              </a:rPr>
+              <a:t>TEAM NAME</a:t>
+            </a:r>
+          </a:p>
+        </p:txBody>
+      </p:sp>
+      <p:sp>
+        <p:nvSpPr>
           <p:cNvPr id="15" name="Freeform 9">
             <a:extLst>
               <a:ext uri="{FF2B5EF4-FFF2-40B4-BE49-F238E27FC236}">
@@ -3560,6 +3737,53 @@
                 <a:sym typeface="Montserrat Classic Bold"/>
               </a:rPr>
               <a:t>PAGE 3</a:t>
+            </a:r>
+          </a:p>
+        </p:txBody>
+      </p:sp>
+      <p:sp>
+        <p:nvSpPr>
+          <p:cNvPr id="16" name="TextBox 8">
+            <a:extLst>
+              <a:ext uri="{FF2B5EF4-FFF2-40B4-BE49-F238E27FC236}">
+                <a16:creationId xmlns:a16="http://schemas.microsoft.com/office/drawing/2014/main" id="{750AED1A-ACEC-381A-1091-A9E8561B7CFF}"/>
+              </a:ext>
+            </a:extLst>
+          </p:cNvPr>
+          <p:cNvSpPr txBox="1"/>
+          <p:nvPr userDrawn="1"/>
+        </p:nvSpPr>
+        <p:spPr>
+          <a:xfrm>
+            <a:off x="1299426" y="9715500"/>
+            <a:ext cx="4556760" cy="318135"/>
+          </a:xfrm>
+          <a:prstGeom prst="rect">
+            <a:avLst/>
+          </a:prstGeom>
+        </p:spPr>
+        <p:txBody>
+          <a:bodyPr lIns="0" tIns="0" rIns="0" bIns="0" rtlCol="0" anchor="t">
+            <a:spAutoFit/>
+          </a:bodyPr>
+          <a:lstStyle/>
+          <a:p>
+            <a:pPr algn="l">
+              <a:lnSpc>
+                <a:spcPts val="2520"/>
+              </a:lnSpc>
+            </a:pPr>
+            <a:r>
+              <a:rPr lang="en-US" sz="2000" b="1" spc="100">
+                <a:solidFill>
+                  <a:srgbClr val="F5F5DC"/>
+                </a:solidFill>
+                <a:latin typeface="Montserrat Classic Bold"/>
+                <a:ea typeface="Montserrat Classic Bold"/>
+                <a:cs typeface="Montserrat Classic Bold"/>
+                <a:sym typeface="Montserrat Classic Bold"/>
+              </a:rPr>
+              <a:t>TEAM NAME</a:t>
             </a:r>
           </a:p>
         </p:txBody>
@@ -4422,6 +4646,53 @@
                 <a:sym typeface="Montserrat Classic Bold"/>
               </a:rPr>
               <a:t>PAGE 4</a:t>
+            </a:r>
+          </a:p>
+        </p:txBody>
+      </p:sp>
+      <p:sp>
+        <p:nvSpPr>
+          <p:cNvPr id="18" name="TextBox 14">
+            <a:extLst>
+              <a:ext uri="{FF2B5EF4-FFF2-40B4-BE49-F238E27FC236}">
+                <a16:creationId xmlns:a16="http://schemas.microsoft.com/office/drawing/2014/main" id="{C189CDBD-4E36-18BB-840D-762E8938C431}"/>
+              </a:ext>
+            </a:extLst>
+          </p:cNvPr>
+          <p:cNvSpPr txBox="1"/>
+          <p:nvPr userDrawn="1"/>
+        </p:nvSpPr>
+        <p:spPr>
+          <a:xfrm>
+            <a:off x="1299426" y="9715500"/>
+            <a:ext cx="4556760" cy="318135"/>
+          </a:xfrm>
+          <a:prstGeom prst="rect">
+            <a:avLst/>
+          </a:prstGeom>
+        </p:spPr>
+        <p:txBody>
+          <a:bodyPr lIns="0" tIns="0" rIns="0" bIns="0" rtlCol="0" anchor="t">
+            <a:spAutoFit/>
+          </a:bodyPr>
+          <a:lstStyle/>
+          <a:p>
+            <a:pPr algn="l">
+              <a:lnSpc>
+                <a:spcPts val="2520"/>
+              </a:lnSpc>
+            </a:pPr>
+            <a:r>
+              <a:rPr lang="en-US" sz="2000" b="1" spc="100">
+                <a:solidFill>
+                  <a:srgbClr val="F5F5DC"/>
+                </a:solidFill>
+                <a:latin typeface="Montserrat Classic Bold"/>
+                <a:ea typeface="Montserrat Classic Bold"/>
+                <a:cs typeface="Montserrat Classic Bold"/>
+                <a:sym typeface="Montserrat Classic Bold"/>
+              </a:rPr>
+              <a:t>TEAM NAME</a:t>
             </a:r>
           </a:p>
         </p:txBody>
@@ -5201,7 +5472,7 @@
         <p:spPr>
           <a:xfrm>
             <a:off x="685800" y="1790700"/>
-            <a:ext cx="16535400" cy="6490944"/>
+            <a:ext cx="16535400" cy="6054927"/>
           </a:xfrm>
           <a:prstGeom prst="rect">
             <a:avLst/>
@@ -5368,27 +5639,6 @@
                 <a:cs typeface="Montserrat Classic"/>
                 <a:sym typeface="Montserrat Classic"/>
               </a:rPr>
-              <a:t>Processor ↔ Memory bottleneck diagram</a:t>
-            </a:r>
-          </a:p>
-          <a:p>
-            <a:pPr marL="579358" lvl="1" indent="-289679" algn="l">
-              <a:lnSpc>
-                <a:spcPts val="3381"/>
-              </a:lnSpc>
-              <a:buFont typeface="Arial"/>
-              <a:buChar char="•"/>
-            </a:pPr>
-            <a:r>
-              <a:rPr lang="en-US" sz="2400" spc="134" dirty="0">
-                <a:solidFill>
-                  <a:srgbClr val="F5F5DC"/>
-                </a:solidFill>
-                <a:latin typeface="Montserrat Classic"/>
-                <a:ea typeface="Montserrat Classic"/>
-                <a:cs typeface="Montserrat Classic"/>
-                <a:sym typeface="Montserrat Classic"/>
-              </a:rPr>
               <a:t>Graph showing power vs performance or scaling trend</a:t>
             </a:r>
           </a:p>
@@ -5511,53 +5761,6 @@
                 <a:sym typeface="Montserrat Classic"/>
               </a:rPr>
               <a:t>AI can assist in research, but your analysis and creativity should drive the presentation.</a:t>
-            </a:r>
-          </a:p>
-        </p:txBody>
-      </p:sp>
-      <p:sp>
-        <p:nvSpPr>
-          <p:cNvPr id="13" name="TextBox 8">
-            <a:extLst>
-              <a:ext uri="{FF2B5EF4-FFF2-40B4-BE49-F238E27FC236}">
-                <a16:creationId xmlns:a16="http://schemas.microsoft.com/office/drawing/2014/main" id="{7D3C03E1-149B-AE18-4FF5-7AF4BAE71982}"/>
-              </a:ext>
-            </a:extLst>
-          </p:cNvPr>
-          <p:cNvSpPr txBox="1"/>
-          <p:nvPr/>
-        </p:nvSpPr>
-        <p:spPr>
-          <a:xfrm>
-            <a:off x="1299426" y="9715500"/>
-            <a:ext cx="4556760" cy="318135"/>
-          </a:xfrm>
-          <a:prstGeom prst="rect">
-            <a:avLst/>
-          </a:prstGeom>
-        </p:spPr>
-        <p:txBody>
-          <a:bodyPr lIns="0" tIns="0" rIns="0" bIns="0" rtlCol="0" anchor="t">
-            <a:spAutoFit/>
-          </a:bodyPr>
-          <a:lstStyle/>
-          <a:p>
-            <a:pPr algn="l">
-              <a:lnSpc>
-                <a:spcPts val="2520"/>
-              </a:lnSpc>
-            </a:pPr>
-            <a:r>
-              <a:rPr lang="en-US" sz="2000" b="1" spc="100" dirty="0">
-                <a:solidFill>
-                  <a:srgbClr val="F5F5DC"/>
-                </a:solidFill>
-                <a:latin typeface="Montserrat Classic Bold"/>
-                <a:ea typeface="Montserrat Classic Bold"/>
-                <a:cs typeface="Montserrat Classic Bold"/>
-                <a:sym typeface="Montserrat Classic Bold"/>
-              </a:rPr>
-              <a:t>TEAM NAME</a:t>
             </a:r>
           </a:p>
         </p:txBody>
@@ -5697,7 +5900,31 @@
                 <a:cs typeface="Montserrat Classic"/>
                 <a:sym typeface="Montserrat Classic"/>
               </a:rPr>
-              <a:t>Workflow: Input → Processing → Output</a:t>
+              <a:t>Workflow: Input → Processing → Output </a:t>
+            </a:r>
+            <a:r>
+              <a:rPr lang="en-US" sz="2400" spc="134">
+                <a:solidFill>
+                  <a:srgbClr val="F5F5DC"/>
+                </a:solidFill>
+                <a:latin typeface="Montserrat Classic"/>
+                <a:ea typeface="Montserrat Classic"/>
+                <a:cs typeface="Montserrat Classic"/>
+                <a:sym typeface="Montserrat Classic"/>
+              </a:rPr>
+              <a:t>(FSM design </a:t>
+            </a:r>
+            <a:r>
+              <a:rPr lang="en-US" sz="2400" spc="134" dirty="0">
+                <a:solidFill>
+                  <a:srgbClr val="F5F5DC"/>
+                </a:solidFill>
+                <a:latin typeface="Montserrat Classic"/>
+                <a:ea typeface="Montserrat Classic"/>
+                <a:cs typeface="Montserrat Classic"/>
+                <a:sym typeface="Montserrat Classic"/>
+              </a:rPr>
+              <a:t>can be included)</a:t>
             </a:r>
           </a:p>
           <a:p>
@@ -5896,53 +6123,6 @@
                 <a:sym typeface="Montserrat Classic"/>
               </a:rPr>
               <a:t>Keep diagrams simple and readable</a:t>
-            </a:r>
-          </a:p>
-        </p:txBody>
-      </p:sp>
-      <p:sp>
-        <p:nvSpPr>
-          <p:cNvPr id="3" name="TextBox 8">
-            <a:extLst>
-              <a:ext uri="{FF2B5EF4-FFF2-40B4-BE49-F238E27FC236}">
-                <a16:creationId xmlns:a16="http://schemas.microsoft.com/office/drawing/2014/main" id="{89B485AA-F840-1412-07B4-5A97A380491D}"/>
-              </a:ext>
-            </a:extLst>
-          </p:cNvPr>
-          <p:cNvSpPr txBox="1"/>
-          <p:nvPr/>
-        </p:nvSpPr>
-        <p:spPr>
-          <a:xfrm>
-            <a:off x="1299426" y="9715500"/>
-            <a:ext cx="4556760" cy="318135"/>
-          </a:xfrm>
-          <a:prstGeom prst="rect">
-            <a:avLst/>
-          </a:prstGeom>
-        </p:spPr>
-        <p:txBody>
-          <a:bodyPr lIns="0" tIns="0" rIns="0" bIns="0" rtlCol="0" anchor="t">
-            <a:spAutoFit/>
-          </a:bodyPr>
-          <a:lstStyle/>
-          <a:p>
-            <a:pPr algn="l">
-              <a:lnSpc>
-                <a:spcPts val="2520"/>
-              </a:lnSpc>
-            </a:pPr>
-            <a:r>
-              <a:rPr lang="en-US" sz="2000" b="1" spc="100" dirty="0">
-                <a:solidFill>
-                  <a:srgbClr val="F5F5DC"/>
-                </a:solidFill>
-                <a:latin typeface="Montserrat Classic Bold"/>
-                <a:ea typeface="Montserrat Classic Bold"/>
-                <a:cs typeface="Montserrat Classic Bold"/>
-                <a:sym typeface="Montserrat Classic Bold"/>
-              </a:rPr>
-              <a:t>TEAM NAME</a:t>
             </a:r>
           </a:p>
         </p:txBody>
@@ -5992,7 +6172,7 @@
         <p:spPr>
           <a:xfrm>
             <a:off x="685800" y="1790700"/>
-            <a:ext cx="16535400" cy="5618910"/>
+            <a:ext cx="16535400" cy="3874843"/>
           </a:xfrm>
           <a:prstGeom prst="rect">
             <a:avLst/>
@@ -6042,16 +6222,7 @@
               </a:rPr>
               <a:t>Implementation method (FPGA / simulation)</a:t>
             </a:r>
-          </a:p>
-          <a:p>
-            <a:pPr marL="579358" lvl="1" indent="-289679" algn="l">
-              <a:lnSpc>
-                <a:spcPts val="3381"/>
-              </a:lnSpc>
-              <a:buFont typeface="Arial"/>
-              <a:buChar char="•"/>
-            </a:pPr>
-            <a:r>
+            <a:br>
               <a:rPr lang="en-US" sz="2400" spc="134" dirty="0">
                 <a:solidFill>
                   <a:srgbClr val="F5F5DC"/>
@@ -6061,17 +6232,7 @@
                 <a:cs typeface="Montserrat Classic"/>
                 <a:sym typeface="Montserrat Classic"/>
               </a:rPr>
-              <a:t>Metrics: power, delay, area</a:t>
-            </a:r>
-          </a:p>
-          <a:p>
-            <a:pPr marL="579358" lvl="1" indent="-289679" algn="l">
-              <a:lnSpc>
-                <a:spcPts val="3381"/>
-              </a:lnSpc>
-              <a:buFont typeface="Arial"/>
-              <a:buChar char="•"/>
-            </a:pPr>
+            </a:br>
             <a:r>
               <a:rPr lang="en-US" sz="2400" spc="134" dirty="0">
                 <a:solidFill>
@@ -6082,17 +6243,19 @@
                 <a:cs typeface="Montserrat Classic"/>
                 <a:sym typeface="Montserrat Classic"/>
               </a:rPr>
-              <a:t>Testing approach (testbench, validation)</a:t>
-            </a:r>
-          </a:p>
-          <a:p>
-            <a:pPr marL="579358" lvl="1" indent="-289679" algn="l">
-              <a:lnSpc>
-                <a:spcPts val="3381"/>
-              </a:lnSpc>
-              <a:buFont typeface="Arial"/>
-              <a:buChar char="•"/>
-            </a:pPr>
+              <a:t>(FPGA Board provided will be ARTY A7-100T)</a:t>
+            </a:r>
+            <a:br>
+              <a:rPr lang="en-US" sz="2400" spc="134" dirty="0">
+                <a:solidFill>
+                  <a:srgbClr val="F5F5DC"/>
+                </a:solidFill>
+                <a:latin typeface="Montserrat Classic"/>
+                <a:ea typeface="Montserrat Classic"/>
+                <a:cs typeface="Montserrat Classic"/>
+                <a:sym typeface="Montserrat Classic"/>
+              </a:rPr>
+            </a:br>
             <a:endParaRPr lang="en-US" sz="2400" spc="134" dirty="0">
               <a:solidFill>
                 <a:srgbClr val="F5F5DC"/>
@@ -6104,7 +6267,7 @@
             </a:endParaRPr>
           </a:p>
           <a:p>
-            <a:pPr algn="l">
+            <a:pPr marL="289679" lvl="1" algn="l">
               <a:lnSpc>
                 <a:spcPts val="3381"/>
               </a:lnSpc>
@@ -6119,65 +6282,49 @@
                 <a:cs typeface="Montserrat Classic"/>
                 <a:sym typeface="Montserrat Classic"/>
               </a:rPr>
-              <a:t>Visuals:</a:t>
-            </a:r>
-          </a:p>
-          <a:p>
-            <a:pPr marL="579358" lvl="1" indent="-289679" algn="l">
+              <a:t>Suggestions:</a:t>
+            </a:r>
+          </a:p>
+          <a:p>
+            <a:pPr marL="746879" lvl="1" indent="-457200" algn="l">
               <a:lnSpc>
                 <a:spcPts val="3381"/>
               </a:lnSpc>
-              <a:buFont typeface="Arial"/>
+              <a:buFont typeface="Arial" panose="020B0604020202020204" pitchFamily="34" charset="0"/>
               <a:buChar char="•"/>
             </a:pPr>
             <a:r>
               <a:rPr lang="en-US" sz="2400" spc="134" dirty="0">
                 <a:solidFill>
-                  <a:srgbClr val="F5F5DC"/>
+                  <a:schemeClr val="bg1"/>
                 </a:solidFill>
                 <a:latin typeface="Montserrat Classic"/>
                 <a:ea typeface="Montserrat Classic"/>
                 <a:cs typeface="Montserrat Classic"/>
                 <a:sym typeface="Montserrat Classic"/>
               </a:rPr>
-              <a:t>Simulation waveform / FPGA setup</a:t>
-            </a:r>
-          </a:p>
-          <a:p>
-            <a:pPr marL="579358" lvl="1" indent="-289679" algn="l">
+              <a:t>Clearly explain how your solution changes the real world.</a:t>
+            </a:r>
+          </a:p>
+          <a:p>
+            <a:pPr marL="746879" lvl="1" indent="-457200" algn="l">
               <a:lnSpc>
                 <a:spcPts val="3381"/>
               </a:lnSpc>
-              <a:buFont typeface="Arial"/>
+              <a:buFont typeface="Arial" panose="020B0604020202020204" pitchFamily="34" charset="0"/>
               <a:buChar char="•"/>
             </a:pPr>
-            <a:endParaRPr lang="en-US" sz="2400" spc="134" dirty="0">
-              <a:solidFill>
-                <a:srgbClr val="F5F5DC"/>
-              </a:solidFill>
-              <a:latin typeface="Montserrat Classic"/>
-              <a:ea typeface="Montserrat Classic"/>
-              <a:cs typeface="Montserrat Classic"/>
-              <a:sym typeface="Montserrat Classic"/>
-            </a:endParaRPr>
-          </a:p>
-          <a:p>
-            <a:pPr marL="289679" lvl="1" algn="l">
-              <a:lnSpc>
-                <a:spcPts val="3381"/>
-              </a:lnSpc>
-            </a:pPr>
-            <a:r>
-              <a:rPr lang="en-US" sz="2400" b="1" spc="134" dirty="0">
-                <a:solidFill>
-                  <a:srgbClr val="FFC000"/>
+            <a:r>
+              <a:rPr lang="en-US" sz="2400" spc="134" dirty="0">
+                <a:solidFill>
+                  <a:schemeClr val="bg1"/>
                 </a:solidFill>
                 <a:latin typeface="Montserrat Classic"/>
                 <a:ea typeface="Montserrat Classic"/>
                 <a:cs typeface="Montserrat Classic"/>
                 <a:sym typeface="Montserrat Classic"/>
               </a:rPr>
-              <a:t>Suggestions:</a:t>
+              <a:t>Consider technical feasibility, affordability, and scalability..</a:t>
             </a:r>
           </a:p>
           <a:p>
@@ -6198,7 +6345,7 @@
                 <a:cs typeface="Montserrat Classic"/>
                 <a:sym typeface="Montserrat Classic"/>
               </a:rPr>
-              <a:t>Clearly explain how your solution changes the real world.</a:t>
+              <a:t>Think about who will adopt the solution and why.</a:t>
             </a:r>
           </a:p>
           <a:p>
@@ -6219,48 +6366,6 @@
                 <a:cs typeface="Montserrat Classic"/>
                 <a:sym typeface="Montserrat Classic"/>
               </a:rPr>
-              <a:t>Consider technical feasibility, affordability, and scalability..</a:t>
-            </a:r>
-          </a:p>
-          <a:p>
-            <a:pPr marL="746879" lvl="1" indent="-457200" algn="l">
-              <a:lnSpc>
-                <a:spcPts val="3381"/>
-              </a:lnSpc>
-              <a:buFont typeface="Arial" panose="020B0604020202020204" pitchFamily="34" charset="0"/>
-              <a:buChar char="•"/>
-            </a:pPr>
-            <a:r>
-              <a:rPr lang="en-US" sz="2400" spc="134" dirty="0">
-                <a:solidFill>
-                  <a:schemeClr val="bg1"/>
-                </a:solidFill>
-                <a:latin typeface="Montserrat Classic"/>
-                <a:ea typeface="Montserrat Classic"/>
-                <a:cs typeface="Montserrat Classic"/>
-                <a:sym typeface="Montserrat Classic"/>
-              </a:rPr>
-              <a:t>Think about who will adopt the solution and why.</a:t>
-            </a:r>
-          </a:p>
-          <a:p>
-            <a:pPr marL="746879" lvl="1" indent="-457200" algn="l">
-              <a:lnSpc>
-                <a:spcPts val="3381"/>
-              </a:lnSpc>
-              <a:buFont typeface="Arial" panose="020B0604020202020204" pitchFamily="34" charset="0"/>
-              <a:buChar char="•"/>
-            </a:pPr>
-            <a:r>
-              <a:rPr lang="en-US" sz="2400" spc="134" dirty="0">
-                <a:solidFill>
-                  <a:schemeClr val="bg1"/>
-                </a:solidFill>
-                <a:latin typeface="Montserrat Classic"/>
-                <a:ea typeface="Montserrat Classic"/>
-                <a:cs typeface="Montserrat Classic"/>
-                <a:sym typeface="Montserrat Classic"/>
-              </a:rPr>
               <a:t>Show approximate cost and deployment feasibility</a:t>
             </a:r>
           </a:p>
@@ -6268,10 +6373,64 @@
       </p:sp>
       <p:sp>
         <p:nvSpPr>
-          <p:cNvPr id="2" name="TextBox 8">
+          <p:cNvPr id="2" name="Rectangle 1">
             <a:extLst>
               <a:ext uri="{FF2B5EF4-FFF2-40B4-BE49-F238E27FC236}">
-                <a16:creationId xmlns:a16="http://schemas.microsoft.com/office/drawing/2014/main" id="{45640C2C-8EF9-840E-6C2A-9DBB9CC9FC88}"/>
+                <a16:creationId xmlns:a16="http://schemas.microsoft.com/office/drawing/2014/main" id="{024732D7-B310-5D91-0DE1-A0ABB8367F00}"/>
+              </a:ext>
+            </a:extLst>
+          </p:cNvPr>
+          <p:cNvSpPr/>
+          <p:nvPr/>
+        </p:nvSpPr>
+        <p:spPr>
+          <a:xfrm>
+            <a:off x="4499484" y="6408068"/>
+            <a:ext cx="9289032" cy="2088232"/>
+          </a:xfrm>
+          <a:prstGeom prst="rect">
+            <a:avLst/>
+          </a:prstGeom>
+          <a:noFill/>
+          <a:ln>
+            <a:solidFill>
+              <a:schemeClr val="bg1">
+                <a:lumMod val="95000"/>
+              </a:schemeClr>
+            </a:solidFill>
+          </a:ln>
+        </p:spPr>
+        <p:style>
+          <a:lnRef idx="2">
+            <a:schemeClr val="accent1">
+              <a:shade val="15000"/>
+            </a:schemeClr>
+          </a:lnRef>
+          <a:fillRef idx="1">
+            <a:schemeClr val="accent1"/>
+          </a:fillRef>
+          <a:effectRef idx="0">
+            <a:schemeClr val="accent1"/>
+          </a:effectRef>
+          <a:fontRef idx="minor">
+            <a:schemeClr val="lt1"/>
+          </a:fontRef>
+        </p:style>
+        <p:txBody>
+          <a:bodyPr rtlCol="0" anchor="ctr"/>
+          <a:lstStyle/>
+          <a:p>
+            <a:pPr algn="ctr"/>
+            <a:endParaRPr lang="en-IN"/>
+          </a:p>
+        </p:txBody>
+      </p:sp>
+      <p:sp>
+        <p:nvSpPr>
+          <p:cNvPr id="4" name="TextBox 3">
+            <a:extLst>
+              <a:ext uri="{FF2B5EF4-FFF2-40B4-BE49-F238E27FC236}">
+                <a16:creationId xmlns:a16="http://schemas.microsoft.com/office/drawing/2014/main" id="{35622807-D63C-B90E-5683-4F6E9FF49F8E}"/>
               </a:ext>
             </a:extLst>
           </p:cNvPr>
@@ -6280,36 +6439,49 @@
         </p:nvSpPr>
         <p:spPr>
           <a:xfrm>
-            <a:off x="1299426" y="9715500"/>
-            <a:ext cx="4556760" cy="318135"/>
+            <a:off x="4931532" y="7267518"/>
+            <a:ext cx="8424936" cy="369332"/>
           </a:xfrm>
           <a:prstGeom prst="rect">
             <a:avLst/>
           </a:prstGeom>
+          <a:noFill/>
         </p:spPr>
         <p:txBody>
-          <a:bodyPr lIns="0" tIns="0" rIns="0" bIns="0" rtlCol="0" anchor="t">
+          <a:bodyPr wrap="square" rtlCol="0">
             <a:spAutoFit/>
           </a:bodyPr>
           <a:lstStyle/>
           <a:p>
-            <a:pPr algn="l">
-              <a:lnSpc>
-                <a:spcPts val="2520"/>
-              </a:lnSpc>
-            </a:pPr>
-            <a:r>
-              <a:rPr lang="en-US" sz="2000" b="1" spc="100" dirty="0">
-                <a:solidFill>
-                  <a:srgbClr val="F5F5DC"/>
-                </a:solidFill>
-                <a:latin typeface="Montserrat Classic Bold"/>
-                <a:ea typeface="Montserrat Classic Bold"/>
-                <a:cs typeface="Montserrat Classic Bold"/>
-                <a:sym typeface="Montserrat Classic Bold"/>
-              </a:rPr>
-              <a:t>TEAM NAME</a:t>
-            </a:r>
+            <a:r>
+              <a:rPr lang="en-US" dirty="0">
+                <a:solidFill>
+                  <a:schemeClr val="bg1"/>
+                </a:solidFill>
+              </a:rPr>
+              <a:t>Fill the Google form if you require FPGA Board: </a:t>
+            </a:r>
+            <a:r>
+              <a:rPr lang="en-US">
+                <a:solidFill>
+                  <a:schemeClr val="bg1"/>
+                </a:solidFill>
+              </a:rPr>
+              <a:t>https://</a:t>
+            </a:r>
+            <a:r>
+              <a:rPr lang="en-US" dirty="0">
+                <a:solidFill>
+                  <a:schemeClr val="bg1"/>
+                </a:solidFill>
+              </a:rPr>
+              <a:t>forms.gle/CRTrWkrApVj5dK829 </a:t>
+            </a:r>
+            <a:endParaRPr lang="en-IN" dirty="0">
+              <a:solidFill>
+                <a:schemeClr val="bg1"/>
+              </a:solidFill>
+            </a:endParaRPr>
           </a:p>
         </p:txBody>
       </p:sp>
@@ -6444,53 +6616,6 @@
                 <a:sym typeface="Montserrat Classic"/>
               </a:rPr>
               <a:t>Keep it within this box  [“Ideas are common. Execution makes the difference.”]</a:t>
-            </a:r>
-          </a:p>
-        </p:txBody>
-      </p:sp>
-      <p:sp>
-        <p:nvSpPr>
-          <p:cNvPr id="3" name="TextBox 8">
-            <a:extLst>
-              <a:ext uri="{FF2B5EF4-FFF2-40B4-BE49-F238E27FC236}">
-                <a16:creationId xmlns:a16="http://schemas.microsoft.com/office/drawing/2014/main" id="{44ED1A53-679E-B679-2CC8-66C7A62718AD}"/>
-              </a:ext>
-            </a:extLst>
-          </p:cNvPr>
-          <p:cNvSpPr txBox="1"/>
-          <p:nvPr/>
-        </p:nvSpPr>
-        <p:spPr>
-          <a:xfrm>
-            <a:off x="1299426" y="9715500"/>
-            <a:ext cx="4556760" cy="318135"/>
-          </a:xfrm>
-          <a:prstGeom prst="rect">
-            <a:avLst/>
-          </a:prstGeom>
-        </p:spPr>
-        <p:txBody>
-          <a:bodyPr lIns="0" tIns="0" rIns="0" bIns="0" rtlCol="0" anchor="t">
-            <a:spAutoFit/>
-          </a:bodyPr>
-          <a:lstStyle/>
-          <a:p>
-            <a:pPr algn="l">
-              <a:lnSpc>
-                <a:spcPts val="2520"/>
-              </a:lnSpc>
-            </a:pPr>
-            <a:r>
-              <a:rPr lang="en-US" sz="2000" b="1" spc="100" dirty="0">
-                <a:solidFill>
-                  <a:srgbClr val="F5F5DC"/>
-                </a:solidFill>
-                <a:latin typeface="Montserrat Classic Bold"/>
-                <a:ea typeface="Montserrat Classic Bold"/>
-                <a:cs typeface="Montserrat Classic Bold"/>
-                <a:sym typeface="Montserrat Classic Bold"/>
-              </a:rPr>
-              <a:t>TEAM NAME</a:t>
             </a:r>
           </a:p>
         </p:txBody>
